--- a/presentations/aws-devops-agent-presentation.pptx
+++ b/presentations/aws-devops-agent-presentation.pptx
@@ -8435,7 +8435,7 @@
         <p:spPr>
           <a:xfrm>
             <a:off x="502920" y="2295144"/>
-            <a:ext cx="11183112" cy="795528"/>
+            <a:ext cx="11183112" cy="969264"/>
           </a:xfrm>
           <a:prstGeom prst="roundRect">
             <a:avLst>
@@ -8479,28 +8479,28 @@
         </p:nvSpPr>
         <p:spPr>
           <a:xfrm>
-            <a:off x="704088" y="2450592"/>
-            <a:ext cx="10789920" cy="475488"/>
-          </a:xfrm>
-          <a:prstGeom prst="rect">
-            <a:avLst/>
-          </a:prstGeom>
-          <a:noFill/>
-        </p:spPr>
-        <p:txBody>
-          <a:bodyPr wrap="square" lIns="0" rIns="0" tIns="0" bIns="0" anchor="t">
-            <a:spAutoFit/>
-          </a:bodyPr>
-          <a:lstStyle/>
-          <a:p>
-            <a:pPr>
-              <a:lnSpc>
-                <a:spcPct val="112000"/>
-              </a:lnSpc>
-              <a:spcAft>
-                <a:spcPts val="300"/>
-              </a:spcAft>
-              <a:defRPr sz="1550" b="0">
+            <a:off x="704088" y="2432304"/>
+            <a:ext cx="10789920" cy="713232"/>
+          </a:xfrm>
+          <a:prstGeom prst="rect">
+            <a:avLst/>
+          </a:prstGeom>
+          <a:noFill/>
+        </p:spPr>
+        <p:txBody>
+          <a:bodyPr wrap="square" lIns="0" rIns="0" tIns="0" bIns="0" anchor="t">
+            <a:spAutoFit/>
+          </a:bodyPr>
+          <a:lstStyle/>
+          <a:p>
+            <a:pPr>
+              <a:lnSpc>
+                <a:spcPct val="112000"/>
+              </a:lnSpc>
+              <a:spcAft>
+                <a:spcPts val="300"/>
+              </a:spcAft>
+              <a:defRPr sz="1500" b="0">
                 <a:solidFill>
                   <a:srgbClr val="FFFFFF"/>
                 </a:solidFill>
@@ -8521,7 +8521,7 @@
         </p:nvSpPr>
         <p:spPr>
           <a:xfrm>
-            <a:off x="502920" y="3264408"/>
+            <a:off x="502920" y="3429000"/>
             <a:ext cx="3200400" cy="201168"/>
           </a:xfrm>
           <a:prstGeom prst="rect">
@@ -8563,7 +8563,7 @@
         </p:nvSpPr>
         <p:spPr>
           <a:xfrm>
-            <a:off x="502920" y="3520439"/>
+            <a:off x="502920" y="3685032"/>
             <a:ext cx="3337560" cy="612648"/>
           </a:xfrm>
           <a:prstGeom prst="rect">
@@ -8605,7 +8605,7 @@
         </p:nvSpPr>
         <p:spPr>
           <a:xfrm>
-            <a:off x="502920" y="4224528"/>
+            <a:off x="502920" y="4389120"/>
             <a:ext cx="3200400" cy="201168"/>
           </a:xfrm>
           <a:prstGeom prst="rect">
@@ -8647,7 +8647,7 @@
         </p:nvSpPr>
         <p:spPr>
           <a:xfrm>
-            <a:off x="502920" y="4480560"/>
+            <a:off x="502920" y="4645152"/>
             <a:ext cx="3337560" cy="612648"/>
           </a:xfrm>
           <a:prstGeom prst="rect">
@@ -8689,7 +8689,7 @@
         </p:nvSpPr>
         <p:spPr>
           <a:xfrm>
-            <a:off x="502920" y="5184648"/>
+            <a:off x="502920" y="5349240"/>
             <a:ext cx="3200400" cy="201168"/>
           </a:xfrm>
           <a:prstGeom prst="rect">
@@ -8731,7 +8731,7 @@
         </p:nvSpPr>
         <p:spPr>
           <a:xfrm>
-            <a:off x="502920" y="5440680"/>
+            <a:off x="502920" y="5605272"/>
             <a:ext cx="3337560" cy="612648"/>
           </a:xfrm>
           <a:prstGeom prst="rect">
@@ -8773,8 +8773,8 @@
         </p:nvSpPr>
         <p:spPr>
           <a:xfrm>
-            <a:off x="4096512" y="3246120"/>
-            <a:ext cx="7589520" cy="534009"/>
+            <a:off x="4096512" y="3410712"/>
+            <a:ext cx="7589520" cy="501091"/>
           </a:xfrm>
           <a:prstGeom prst="roundRect">
             <a:avLst>
@@ -8818,7 +8818,7 @@
         </p:nvSpPr>
         <p:spPr>
           <a:xfrm>
-            <a:off x="4233672" y="3355848"/>
+            <a:off x="4233672" y="3520440"/>
             <a:ext cx="594360" cy="256032"/>
           </a:xfrm>
           <a:prstGeom prst="rect">
@@ -8860,7 +8860,7 @@
         </p:nvSpPr>
         <p:spPr>
           <a:xfrm>
-            <a:off x="4937760" y="3319272"/>
+            <a:off x="4937760" y="3483864"/>
             <a:ext cx="6537960" cy="219456"/>
           </a:xfrm>
           <a:prstGeom prst="rect">
@@ -8902,28 +8902,28 @@
         </p:nvSpPr>
         <p:spPr>
           <a:xfrm>
-            <a:off x="4937760" y="3557015"/>
-            <a:ext cx="6537960" cy="232257"/>
-          </a:xfrm>
-          <a:prstGeom prst="rect">
-            <a:avLst/>
-          </a:prstGeom>
-          <a:noFill/>
-        </p:spPr>
-        <p:txBody>
-          <a:bodyPr wrap="square" lIns="0" rIns="0" tIns="0" bIns="0" anchor="t">
-            <a:spAutoFit/>
-          </a:bodyPr>
-          <a:lstStyle/>
-          <a:p>
-            <a:pPr>
-              <a:lnSpc>
-                <a:spcPct val="112000"/>
-              </a:lnSpc>
-              <a:spcAft>
-                <a:spcPts val="300"/>
-              </a:spcAft>
-              <a:defRPr sz="1400" b="0">
+            <a:off x="4937760" y="3685032"/>
+            <a:ext cx="6537960" cy="263347"/>
+          </a:xfrm>
+          <a:prstGeom prst="rect">
+            <a:avLst/>
+          </a:prstGeom>
+          <a:noFill/>
+        </p:spPr>
+        <p:txBody>
+          <a:bodyPr wrap="square" lIns="0" rIns="0" tIns="0" bIns="0" anchor="t">
+            <a:spAutoFit/>
+          </a:bodyPr>
+          <a:lstStyle/>
+          <a:p>
+            <a:pPr>
+              <a:lnSpc>
+                <a:spcPct val="112000"/>
+              </a:lnSpc>
+              <a:spcAft>
+                <a:spcPts val="300"/>
+              </a:spcAft>
+              <a:defRPr sz="1350" b="0">
                 <a:solidFill>
                   <a:srgbClr val="182B43"/>
                 </a:solidFill>
@@ -8944,8 +8944,8 @@
         </p:nvSpPr>
         <p:spPr>
           <a:xfrm>
-            <a:off x="4096512" y="3834993"/>
-            <a:ext cx="7589520" cy="534009"/>
+            <a:off x="4096512" y="3966667"/>
+            <a:ext cx="7589520" cy="501091"/>
           </a:xfrm>
           <a:prstGeom prst="roundRect">
             <a:avLst>
@@ -8989,7 +8989,7 @@
         </p:nvSpPr>
         <p:spPr>
           <a:xfrm>
-            <a:off x="4233672" y="3944721"/>
+            <a:off x="4233672" y="4076395"/>
             <a:ext cx="594360" cy="256032"/>
           </a:xfrm>
           <a:prstGeom prst="rect">
@@ -9031,7 +9031,7 @@
         </p:nvSpPr>
         <p:spPr>
           <a:xfrm>
-            <a:off x="4937760" y="3908145"/>
+            <a:off x="4937760" y="4039819"/>
             <a:ext cx="6537960" cy="219456"/>
           </a:xfrm>
           <a:prstGeom prst="rect">
@@ -9073,28 +9073,28 @@
         </p:nvSpPr>
         <p:spPr>
           <a:xfrm>
-            <a:off x="4937760" y="4145889"/>
-            <a:ext cx="6537960" cy="232257"/>
-          </a:xfrm>
-          <a:prstGeom prst="rect">
-            <a:avLst/>
-          </a:prstGeom>
-          <a:noFill/>
-        </p:spPr>
-        <p:txBody>
-          <a:bodyPr wrap="square" lIns="0" rIns="0" tIns="0" bIns="0" anchor="t">
-            <a:spAutoFit/>
-          </a:bodyPr>
-          <a:lstStyle/>
-          <a:p>
-            <a:pPr>
-              <a:lnSpc>
-                <a:spcPct val="112000"/>
-              </a:lnSpc>
-              <a:spcAft>
-                <a:spcPts val="300"/>
-              </a:spcAft>
-              <a:defRPr sz="1400" b="0">
+            <a:off x="4937760" y="4240987"/>
+            <a:ext cx="6537960" cy="263347"/>
+          </a:xfrm>
+          <a:prstGeom prst="rect">
+            <a:avLst/>
+          </a:prstGeom>
+          <a:noFill/>
+        </p:spPr>
+        <p:txBody>
+          <a:bodyPr wrap="square" lIns="0" rIns="0" tIns="0" bIns="0" anchor="t">
+            <a:spAutoFit/>
+          </a:bodyPr>
+          <a:lstStyle/>
+          <a:p>
+            <a:pPr>
+              <a:lnSpc>
+                <a:spcPct val="112000"/>
+              </a:lnSpc>
+              <a:spcAft>
+                <a:spcPts val="300"/>
+              </a:spcAft>
+              <a:defRPr sz="1350" b="0">
                 <a:solidFill>
                   <a:srgbClr val="182B43"/>
                 </a:solidFill>
@@ -9115,8 +9115,8 @@
         </p:nvSpPr>
         <p:spPr>
           <a:xfrm>
-            <a:off x="4096512" y="4423867"/>
-            <a:ext cx="7589520" cy="534009"/>
+            <a:off x="4096512" y="4522622"/>
+            <a:ext cx="7589520" cy="501091"/>
           </a:xfrm>
           <a:prstGeom prst="roundRect">
             <a:avLst>
@@ -9160,7 +9160,7 @@
         </p:nvSpPr>
         <p:spPr>
           <a:xfrm>
-            <a:off x="4233672" y="4533595"/>
+            <a:off x="4233672" y="4632350"/>
             <a:ext cx="594360" cy="256032"/>
           </a:xfrm>
           <a:prstGeom prst="rect">
@@ -9202,7 +9202,7 @@
         </p:nvSpPr>
         <p:spPr>
           <a:xfrm>
-            <a:off x="4937760" y="4497019"/>
+            <a:off x="4937760" y="4595774"/>
             <a:ext cx="6537960" cy="219456"/>
           </a:xfrm>
           <a:prstGeom prst="rect">
@@ -9244,28 +9244,28 @@
         </p:nvSpPr>
         <p:spPr>
           <a:xfrm>
-            <a:off x="4937760" y="4734763"/>
-            <a:ext cx="6537960" cy="232257"/>
-          </a:xfrm>
-          <a:prstGeom prst="rect">
-            <a:avLst/>
-          </a:prstGeom>
-          <a:noFill/>
-        </p:spPr>
-        <p:txBody>
-          <a:bodyPr wrap="square" lIns="0" rIns="0" tIns="0" bIns="0" anchor="t">
-            <a:spAutoFit/>
-          </a:bodyPr>
-          <a:lstStyle/>
-          <a:p>
-            <a:pPr>
-              <a:lnSpc>
-                <a:spcPct val="112000"/>
-              </a:lnSpc>
-              <a:spcAft>
-                <a:spcPts val="300"/>
-              </a:spcAft>
-              <a:defRPr sz="1400" b="0">
+            <a:off x="4937760" y="4796942"/>
+            <a:ext cx="6537960" cy="263347"/>
+          </a:xfrm>
+          <a:prstGeom prst="rect">
+            <a:avLst/>
+          </a:prstGeom>
+          <a:noFill/>
+        </p:spPr>
+        <p:txBody>
+          <a:bodyPr wrap="square" lIns="0" rIns="0" tIns="0" bIns="0" anchor="t">
+            <a:spAutoFit/>
+          </a:bodyPr>
+          <a:lstStyle/>
+          <a:p>
+            <a:pPr>
+              <a:lnSpc>
+                <a:spcPct val="112000"/>
+              </a:lnSpc>
+              <a:spcAft>
+                <a:spcPts val="300"/>
+              </a:spcAft>
+              <a:defRPr sz="1350" b="0">
                 <a:solidFill>
                   <a:srgbClr val="182B43"/>
                 </a:solidFill>
@@ -9286,8 +9286,8 @@
         </p:nvSpPr>
         <p:spPr>
           <a:xfrm>
-            <a:off x="4096512" y="5012740"/>
-            <a:ext cx="7589520" cy="534009"/>
+            <a:off x="4096512" y="5078577"/>
+            <a:ext cx="7589520" cy="501091"/>
           </a:xfrm>
           <a:prstGeom prst="roundRect">
             <a:avLst>
@@ -9331,7 +9331,7 @@
         </p:nvSpPr>
         <p:spPr>
           <a:xfrm>
-            <a:off x="4233672" y="5122468"/>
+            <a:off x="4233672" y="5188305"/>
             <a:ext cx="594360" cy="256032"/>
           </a:xfrm>
           <a:prstGeom prst="rect">
@@ -9373,7 +9373,7 @@
         </p:nvSpPr>
         <p:spPr>
           <a:xfrm>
-            <a:off x="4937760" y="5085892"/>
+            <a:off x="4937760" y="5151729"/>
             <a:ext cx="6537960" cy="219456"/>
           </a:xfrm>
           <a:prstGeom prst="rect">
@@ -9415,28 +9415,28 @@
         </p:nvSpPr>
         <p:spPr>
           <a:xfrm>
-            <a:off x="4937760" y="5323636"/>
-            <a:ext cx="6537960" cy="232257"/>
-          </a:xfrm>
-          <a:prstGeom prst="rect">
-            <a:avLst/>
-          </a:prstGeom>
-          <a:noFill/>
-        </p:spPr>
-        <p:txBody>
-          <a:bodyPr wrap="square" lIns="0" rIns="0" tIns="0" bIns="0" anchor="t">
-            <a:spAutoFit/>
-          </a:bodyPr>
-          <a:lstStyle/>
-          <a:p>
-            <a:pPr>
-              <a:lnSpc>
-                <a:spcPct val="112000"/>
-              </a:lnSpc>
-              <a:spcAft>
-                <a:spcPts val="300"/>
-              </a:spcAft>
-              <a:defRPr sz="1400" b="0">
+            <a:off x="4937760" y="5352897"/>
+            <a:ext cx="6537960" cy="263347"/>
+          </a:xfrm>
+          <a:prstGeom prst="rect">
+            <a:avLst/>
+          </a:prstGeom>
+          <a:noFill/>
+        </p:spPr>
+        <p:txBody>
+          <a:bodyPr wrap="square" lIns="0" rIns="0" tIns="0" bIns="0" anchor="t">
+            <a:spAutoFit/>
+          </a:bodyPr>
+          <a:lstStyle/>
+          <a:p>
+            <a:pPr>
+              <a:lnSpc>
+                <a:spcPct val="112000"/>
+              </a:lnSpc>
+              <a:spcAft>
+                <a:spcPts val="300"/>
+              </a:spcAft>
+              <a:defRPr sz="1350" b="0">
                 <a:solidFill>
                   <a:srgbClr val="182B43"/>
                 </a:solidFill>
@@ -9457,8 +9457,8 @@
         </p:nvSpPr>
         <p:spPr>
           <a:xfrm>
-            <a:off x="4096512" y="5601614"/>
-            <a:ext cx="7589520" cy="534009"/>
+            <a:off x="4096512" y="5634532"/>
+            <a:ext cx="7589520" cy="501091"/>
           </a:xfrm>
           <a:prstGeom prst="roundRect">
             <a:avLst>
@@ -9502,7 +9502,7 @@
         </p:nvSpPr>
         <p:spPr>
           <a:xfrm>
-            <a:off x="4233672" y="5711342"/>
+            <a:off x="4233672" y="5744260"/>
             <a:ext cx="594360" cy="256032"/>
           </a:xfrm>
           <a:prstGeom prst="rect">
@@ -9544,7 +9544,7 @@
         </p:nvSpPr>
         <p:spPr>
           <a:xfrm>
-            <a:off x="4937760" y="5674766"/>
+            <a:off x="4937760" y="5707684"/>
             <a:ext cx="6537960" cy="219456"/>
           </a:xfrm>
           <a:prstGeom prst="rect">
@@ -9586,28 +9586,28 @@
         </p:nvSpPr>
         <p:spPr>
           <a:xfrm>
-            <a:off x="4937760" y="5912510"/>
-            <a:ext cx="6537960" cy="232257"/>
-          </a:xfrm>
-          <a:prstGeom prst="rect">
-            <a:avLst/>
-          </a:prstGeom>
-          <a:noFill/>
-        </p:spPr>
-        <p:txBody>
-          <a:bodyPr wrap="square" lIns="0" rIns="0" tIns="0" bIns="0" anchor="t">
-            <a:spAutoFit/>
-          </a:bodyPr>
-          <a:lstStyle/>
-          <a:p>
-            <a:pPr>
-              <a:lnSpc>
-                <a:spcPct val="112000"/>
-              </a:lnSpc>
-              <a:spcAft>
-                <a:spcPts val="300"/>
-              </a:spcAft>
-              <a:defRPr sz="1400" b="0">
+            <a:off x="4937760" y="5908852"/>
+            <a:ext cx="6537960" cy="263347"/>
+          </a:xfrm>
+          <a:prstGeom prst="rect">
+            <a:avLst/>
+          </a:prstGeom>
+          <a:noFill/>
+        </p:spPr>
+        <p:txBody>
+          <a:bodyPr wrap="square" lIns="0" rIns="0" tIns="0" bIns="0" anchor="t">
+            <a:spAutoFit/>
+          </a:bodyPr>
+          <a:lstStyle/>
+          <a:p>
+            <a:pPr>
+              <a:lnSpc>
+                <a:spcPct val="112000"/>
+              </a:lnSpc>
+              <a:spcAft>
+                <a:spcPts val="300"/>
+              </a:spcAft>
+              <a:defRPr sz="1350" b="0">
                 <a:solidFill>
                   <a:srgbClr val="182B43"/>
                 </a:solidFill>
@@ -20081,7 +20081,7 @@
         <p:spPr>
           <a:xfrm>
             <a:off x="502920" y="2295144"/>
-            <a:ext cx="11183112" cy="795528"/>
+            <a:ext cx="11183112" cy="969264"/>
           </a:xfrm>
           <a:prstGeom prst="roundRect">
             <a:avLst>
@@ -20125,28 +20125,28 @@
         </p:nvSpPr>
         <p:spPr>
           <a:xfrm>
-            <a:off x="704088" y="2450592"/>
-            <a:ext cx="10789920" cy="475488"/>
-          </a:xfrm>
-          <a:prstGeom prst="rect">
-            <a:avLst/>
-          </a:prstGeom>
-          <a:noFill/>
-        </p:spPr>
-        <p:txBody>
-          <a:bodyPr wrap="square" lIns="0" rIns="0" tIns="0" bIns="0" anchor="t">
-            <a:spAutoFit/>
-          </a:bodyPr>
-          <a:lstStyle/>
-          <a:p>
-            <a:pPr>
-              <a:lnSpc>
-                <a:spcPct val="112000"/>
-              </a:lnSpc>
-              <a:spcAft>
-                <a:spcPts val="300"/>
-              </a:spcAft>
-              <a:defRPr sz="1400" b="0">
+            <a:off x="704088" y="2432304"/>
+            <a:ext cx="10789920" cy="713232"/>
+          </a:xfrm>
+          <a:prstGeom prst="rect">
+            <a:avLst/>
+          </a:prstGeom>
+          <a:noFill/>
+        </p:spPr>
+        <p:txBody>
+          <a:bodyPr wrap="square" lIns="0" rIns="0" tIns="0" bIns="0" anchor="t">
+            <a:spAutoFit/>
+          </a:bodyPr>
+          <a:lstStyle/>
+          <a:p>
+            <a:pPr>
+              <a:lnSpc>
+                <a:spcPct val="112000"/>
+              </a:lnSpc>
+              <a:spcAft>
+                <a:spcPts val="300"/>
+              </a:spcAft>
+              <a:defRPr sz="1500" b="0">
                 <a:solidFill>
                   <a:srgbClr val="FFFFFF"/>
                 </a:solidFill>
@@ -20167,7 +20167,7 @@
         </p:nvSpPr>
         <p:spPr>
           <a:xfrm>
-            <a:off x="502920" y="3264408"/>
+            <a:off x="502920" y="3429000"/>
             <a:ext cx="3200400" cy="201168"/>
           </a:xfrm>
           <a:prstGeom prst="rect">
@@ -20209,7 +20209,7 @@
         </p:nvSpPr>
         <p:spPr>
           <a:xfrm>
-            <a:off x="502920" y="3520439"/>
+            <a:off x="502920" y="3685032"/>
             <a:ext cx="3337560" cy="612648"/>
           </a:xfrm>
           <a:prstGeom prst="rect">
@@ -20251,7 +20251,7 @@
         </p:nvSpPr>
         <p:spPr>
           <a:xfrm>
-            <a:off x="502920" y="4224528"/>
+            <a:off x="502920" y="4389120"/>
             <a:ext cx="3200400" cy="201168"/>
           </a:xfrm>
           <a:prstGeom prst="rect">
@@ -20293,7 +20293,7 @@
         </p:nvSpPr>
         <p:spPr>
           <a:xfrm>
-            <a:off x="502920" y="4480560"/>
+            <a:off x="502920" y="4645152"/>
             <a:ext cx="3337560" cy="612648"/>
           </a:xfrm>
           <a:prstGeom prst="rect">
@@ -20335,7 +20335,7 @@
         </p:nvSpPr>
         <p:spPr>
           <a:xfrm>
-            <a:off x="502920" y="5184648"/>
+            <a:off x="502920" y="5349240"/>
             <a:ext cx="3200400" cy="201168"/>
           </a:xfrm>
           <a:prstGeom prst="rect">
@@ -20377,7 +20377,7 @@
         </p:nvSpPr>
         <p:spPr>
           <a:xfrm>
-            <a:off x="502920" y="5440680"/>
+            <a:off x="502920" y="5605272"/>
             <a:ext cx="3337560" cy="612648"/>
           </a:xfrm>
           <a:prstGeom prst="rect">
@@ -20419,8 +20419,8 @@
         </p:nvSpPr>
         <p:spPr>
           <a:xfrm>
-            <a:off x="4096512" y="3246120"/>
-            <a:ext cx="7589520" cy="534009"/>
+            <a:off x="4096512" y="3410712"/>
+            <a:ext cx="7589520" cy="501091"/>
           </a:xfrm>
           <a:prstGeom prst="roundRect">
             <a:avLst>
@@ -20464,7 +20464,7 @@
         </p:nvSpPr>
         <p:spPr>
           <a:xfrm>
-            <a:off x="4233672" y="3355848"/>
+            <a:off x="4233672" y="3520440"/>
             <a:ext cx="594360" cy="256032"/>
           </a:xfrm>
           <a:prstGeom prst="rect">
@@ -20506,7 +20506,7 @@
         </p:nvSpPr>
         <p:spPr>
           <a:xfrm>
-            <a:off x="4937760" y="3319272"/>
+            <a:off x="4937760" y="3483864"/>
             <a:ext cx="6537960" cy="219456"/>
           </a:xfrm>
           <a:prstGeom prst="rect">
@@ -20548,28 +20548,28 @@
         </p:nvSpPr>
         <p:spPr>
           <a:xfrm>
-            <a:off x="4937760" y="3557015"/>
-            <a:ext cx="6537960" cy="232257"/>
-          </a:xfrm>
-          <a:prstGeom prst="rect">
-            <a:avLst/>
-          </a:prstGeom>
-          <a:noFill/>
-        </p:spPr>
-        <p:txBody>
-          <a:bodyPr wrap="square" lIns="0" rIns="0" tIns="0" bIns="0" anchor="t">
-            <a:spAutoFit/>
-          </a:bodyPr>
-          <a:lstStyle/>
-          <a:p>
-            <a:pPr>
-              <a:lnSpc>
-                <a:spcPct val="112000"/>
-              </a:lnSpc>
-              <a:spcAft>
-                <a:spcPts val="300"/>
-              </a:spcAft>
-              <a:defRPr sz="1400" b="0">
+            <a:off x="4937760" y="3685032"/>
+            <a:ext cx="6537960" cy="263347"/>
+          </a:xfrm>
+          <a:prstGeom prst="rect">
+            <a:avLst/>
+          </a:prstGeom>
+          <a:noFill/>
+        </p:spPr>
+        <p:txBody>
+          <a:bodyPr wrap="square" lIns="0" rIns="0" tIns="0" bIns="0" anchor="t">
+            <a:spAutoFit/>
+          </a:bodyPr>
+          <a:lstStyle/>
+          <a:p>
+            <a:pPr>
+              <a:lnSpc>
+                <a:spcPct val="112000"/>
+              </a:lnSpc>
+              <a:spcAft>
+                <a:spcPts val="300"/>
+              </a:spcAft>
+              <a:defRPr sz="1350" b="0">
                 <a:solidFill>
                   <a:srgbClr val="182B43"/>
                 </a:solidFill>
@@ -20590,8 +20590,8 @@
         </p:nvSpPr>
         <p:spPr>
           <a:xfrm>
-            <a:off x="4096512" y="3834993"/>
-            <a:ext cx="7589520" cy="534009"/>
+            <a:off x="4096512" y="3966667"/>
+            <a:ext cx="7589520" cy="501091"/>
           </a:xfrm>
           <a:prstGeom prst="roundRect">
             <a:avLst>
@@ -20635,7 +20635,7 @@
         </p:nvSpPr>
         <p:spPr>
           <a:xfrm>
-            <a:off x="4233672" y="3944721"/>
+            <a:off x="4233672" y="4076395"/>
             <a:ext cx="594360" cy="256032"/>
           </a:xfrm>
           <a:prstGeom prst="rect">
@@ -20677,7 +20677,7 @@
         </p:nvSpPr>
         <p:spPr>
           <a:xfrm>
-            <a:off x="4937760" y="3908145"/>
+            <a:off x="4937760" y="4039819"/>
             <a:ext cx="6537960" cy="219456"/>
           </a:xfrm>
           <a:prstGeom prst="rect">
@@ -20719,28 +20719,28 @@
         </p:nvSpPr>
         <p:spPr>
           <a:xfrm>
-            <a:off x="4937760" y="4145889"/>
-            <a:ext cx="6537960" cy="232257"/>
-          </a:xfrm>
-          <a:prstGeom prst="rect">
-            <a:avLst/>
-          </a:prstGeom>
-          <a:noFill/>
-        </p:spPr>
-        <p:txBody>
-          <a:bodyPr wrap="square" lIns="0" rIns="0" tIns="0" bIns="0" anchor="t">
-            <a:spAutoFit/>
-          </a:bodyPr>
-          <a:lstStyle/>
-          <a:p>
-            <a:pPr>
-              <a:lnSpc>
-                <a:spcPct val="112000"/>
-              </a:lnSpc>
-              <a:spcAft>
-                <a:spcPts val="300"/>
-              </a:spcAft>
-              <a:defRPr sz="1400" b="0">
+            <a:off x="4937760" y="4240987"/>
+            <a:ext cx="6537960" cy="263347"/>
+          </a:xfrm>
+          <a:prstGeom prst="rect">
+            <a:avLst/>
+          </a:prstGeom>
+          <a:noFill/>
+        </p:spPr>
+        <p:txBody>
+          <a:bodyPr wrap="square" lIns="0" rIns="0" tIns="0" bIns="0" anchor="t">
+            <a:spAutoFit/>
+          </a:bodyPr>
+          <a:lstStyle/>
+          <a:p>
+            <a:pPr>
+              <a:lnSpc>
+                <a:spcPct val="112000"/>
+              </a:lnSpc>
+              <a:spcAft>
+                <a:spcPts val="300"/>
+              </a:spcAft>
+              <a:defRPr sz="1350" b="0">
                 <a:solidFill>
                   <a:srgbClr val="182B43"/>
                 </a:solidFill>
@@ -20761,8 +20761,8 @@
         </p:nvSpPr>
         <p:spPr>
           <a:xfrm>
-            <a:off x="4096512" y="4423867"/>
-            <a:ext cx="7589520" cy="534009"/>
+            <a:off x="4096512" y="4522622"/>
+            <a:ext cx="7589520" cy="501091"/>
           </a:xfrm>
           <a:prstGeom prst="roundRect">
             <a:avLst>
@@ -20806,7 +20806,7 @@
         </p:nvSpPr>
         <p:spPr>
           <a:xfrm>
-            <a:off x="4233672" y="4533595"/>
+            <a:off x="4233672" y="4632350"/>
             <a:ext cx="594360" cy="256032"/>
           </a:xfrm>
           <a:prstGeom prst="rect">
@@ -20848,7 +20848,7 @@
         </p:nvSpPr>
         <p:spPr>
           <a:xfrm>
-            <a:off x="4937760" y="4497019"/>
+            <a:off x="4937760" y="4595774"/>
             <a:ext cx="6537960" cy="219456"/>
           </a:xfrm>
           <a:prstGeom prst="rect">
@@ -20890,28 +20890,28 @@
         </p:nvSpPr>
         <p:spPr>
           <a:xfrm>
-            <a:off x="4937760" y="4734763"/>
-            <a:ext cx="6537960" cy="232257"/>
-          </a:xfrm>
-          <a:prstGeom prst="rect">
-            <a:avLst/>
-          </a:prstGeom>
-          <a:noFill/>
-        </p:spPr>
-        <p:txBody>
-          <a:bodyPr wrap="square" lIns="0" rIns="0" tIns="0" bIns="0" anchor="t">
-            <a:spAutoFit/>
-          </a:bodyPr>
-          <a:lstStyle/>
-          <a:p>
-            <a:pPr>
-              <a:lnSpc>
-                <a:spcPct val="112000"/>
-              </a:lnSpc>
-              <a:spcAft>
-                <a:spcPts val="300"/>
-              </a:spcAft>
-              <a:defRPr sz="1400" b="0">
+            <a:off x="4937760" y="4796942"/>
+            <a:ext cx="6537960" cy="263347"/>
+          </a:xfrm>
+          <a:prstGeom prst="rect">
+            <a:avLst/>
+          </a:prstGeom>
+          <a:noFill/>
+        </p:spPr>
+        <p:txBody>
+          <a:bodyPr wrap="square" lIns="0" rIns="0" tIns="0" bIns="0" anchor="t">
+            <a:spAutoFit/>
+          </a:bodyPr>
+          <a:lstStyle/>
+          <a:p>
+            <a:pPr>
+              <a:lnSpc>
+                <a:spcPct val="112000"/>
+              </a:lnSpc>
+              <a:spcAft>
+                <a:spcPts val="300"/>
+              </a:spcAft>
+              <a:defRPr sz="1350" b="0">
                 <a:solidFill>
                   <a:srgbClr val="182B43"/>
                 </a:solidFill>
@@ -20932,8 +20932,8 @@
         </p:nvSpPr>
         <p:spPr>
           <a:xfrm>
-            <a:off x="4096512" y="5012740"/>
-            <a:ext cx="7589520" cy="534009"/>
+            <a:off x="4096512" y="5078577"/>
+            <a:ext cx="7589520" cy="501091"/>
           </a:xfrm>
           <a:prstGeom prst="roundRect">
             <a:avLst>
@@ -20977,7 +20977,7 @@
         </p:nvSpPr>
         <p:spPr>
           <a:xfrm>
-            <a:off x="4233672" y="5122468"/>
+            <a:off x="4233672" y="5188305"/>
             <a:ext cx="594360" cy="256032"/>
           </a:xfrm>
           <a:prstGeom prst="rect">
@@ -21019,7 +21019,7 @@
         </p:nvSpPr>
         <p:spPr>
           <a:xfrm>
-            <a:off x="4937760" y="5085892"/>
+            <a:off x="4937760" y="5151729"/>
             <a:ext cx="6537960" cy="219456"/>
           </a:xfrm>
           <a:prstGeom prst="rect">
@@ -21061,28 +21061,28 @@
         </p:nvSpPr>
         <p:spPr>
           <a:xfrm>
-            <a:off x="4937760" y="5323636"/>
-            <a:ext cx="6537960" cy="232257"/>
-          </a:xfrm>
-          <a:prstGeom prst="rect">
-            <a:avLst/>
-          </a:prstGeom>
-          <a:noFill/>
-        </p:spPr>
-        <p:txBody>
-          <a:bodyPr wrap="square" lIns="0" rIns="0" tIns="0" bIns="0" anchor="t">
-            <a:spAutoFit/>
-          </a:bodyPr>
-          <a:lstStyle/>
-          <a:p>
-            <a:pPr>
-              <a:lnSpc>
-                <a:spcPct val="112000"/>
-              </a:lnSpc>
-              <a:spcAft>
-                <a:spcPts val="300"/>
-              </a:spcAft>
-              <a:defRPr sz="1400" b="0">
+            <a:off x="4937760" y="5352897"/>
+            <a:ext cx="6537960" cy="263347"/>
+          </a:xfrm>
+          <a:prstGeom prst="rect">
+            <a:avLst/>
+          </a:prstGeom>
+          <a:noFill/>
+        </p:spPr>
+        <p:txBody>
+          <a:bodyPr wrap="square" lIns="0" rIns="0" tIns="0" bIns="0" anchor="t">
+            <a:spAutoFit/>
+          </a:bodyPr>
+          <a:lstStyle/>
+          <a:p>
+            <a:pPr>
+              <a:lnSpc>
+                <a:spcPct val="112000"/>
+              </a:lnSpc>
+              <a:spcAft>
+                <a:spcPts val="300"/>
+              </a:spcAft>
+              <a:defRPr sz="1350" b="0">
                 <a:solidFill>
                   <a:srgbClr val="182B43"/>
                 </a:solidFill>
@@ -21103,8 +21103,8 @@
         </p:nvSpPr>
         <p:spPr>
           <a:xfrm>
-            <a:off x="4096512" y="5601614"/>
-            <a:ext cx="7589520" cy="534009"/>
+            <a:off x="4096512" y="5634532"/>
+            <a:ext cx="7589520" cy="501091"/>
           </a:xfrm>
           <a:prstGeom prst="roundRect">
             <a:avLst>
@@ -21148,7 +21148,7 @@
         </p:nvSpPr>
         <p:spPr>
           <a:xfrm>
-            <a:off x="4233672" y="5711342"/>
+            <a:off x="4233672" y="5744260"/>
             <a:ext cx="594360" cy="256032"/>
           </a:xfrm>
           <a:prstGeom prst="rect">
@@ -21190,7 +21190,7 @@
         </p:nvSpPr>
         <p:spPr>
           <a:xfrm>
-            <a:off x="4937760" y="5674766"/>
+            <a:off x="4937760" y="5707684"/>
             <a:ext cx="6537960" cy="219456"/>
           </a:xfrm>
           <a:prstGeom prst="rect">
@@ -21232,28 +21232,28 @@
         </p:nvSpPr>
         <p:spPr>
           <a:xfrm>
-            <a:off x="4937760" y="5912510"/>
-            <a:ext cx="6537960" cy="232257"/>
-          </a:xfrm>
-          <a:prstGeom prst="rect">
-            <a:avLst/>
-          </a:prstGeom>
-          <a:noFill/>
-        </p:spPr>
-        <p:txBody>
-          <a:bodyPr wrap="square" lIns="0" rIns="0" tIns="0" bIns="0" anchor="t">
-            <a:spAutoFit/>
-          </a:bodyPr>
-          <a:lstStyle/>
-          <a:p>
-            <a:pPr>
-              <a:lnSpc>
-                <a:spcPct val="112000"/>
-              </a:lnSpc>
-              <a:spcAft>
-                <a:spcPts val="300"/>
-              </a:spcAft>
-              <a:defRPr sz="1400" b="0">
+            <a:off x="4937760" y="5908852"/>
+            <a:ext cx="6537960" cy="263347"/>
+          </a:xfrm>
+          <a:prstGeom prst="rect">
+            <a:avLst/>
+          </a:prstGeom>
+          <a:noFill/>
+        </p:spPr>
+        <p:txBody>
+          <a:bodyPr wrap="square" lIns="0" rIns="0" tIns="0" bIns="0" anchor="t">
+            <a:spAutoFit/>
+          </a:bodyPr>
+          <a:lstStyle/>
+          <a:p>
+            <a:pPr>
+              <a:lnSpc>
+                <a:spcPct val="112000"/>
+              </a:lnSpc>
+              <a:spcAft>
+                <a:spcPts val="300"/>
+              </a:spcAft>
+              <a:defRPr sz="1350" b="0">
                 <a:solidFill>
                   <a:srgbClr val="182B43"/>
                 </a:solidFill>
